--- a/docs/content/summary_stats/summary_stats_activity.pptx
+++ b/docs/content/summary_stats/summary_stats_activity.pptx
@@ -16,6 +16,7 @@
     <p:sldId id="264" r:id="rId10"/>
     <p:sldId id="265" r:id="rId11"/>
     <p:sldId id="266" r:id="rId12"/>
+    <p:sldId id="267" r:id="rId13"/>
   </p:sldIdLst>
   <p:sldSz cx="9144000" cy="5143500" type="screen16x9"/>
   <p:notesSz cx="6858000" cy="9144000"/>
@@ -3402,7 +3403,7 @@
             </a:pPr>
             <a:r>
               <a:rPr/>
-              <a:t>Getting unstuck</a:t>
+              <a:t>Extension — out of class (~30–40 min)</a:t>
             </a:r>
           </a:p>
         </p:txBody>
@@ -3422,16 +3423,251 @@
           <a:bodyPr/>
           <a:lstStyle/>
           <a:p>
+            <a:pPr lvl="0" indent="0" marL="0">
+              <a:buNone/>
+            </a:pPr>
+            <a:r>
+              <a:rPr i="1"/>
+              <a:t>Turn this in with your worksheet. In class you computed n, mean, SD, and SE. Now you add three spread statistics — one of them new — and reason about what each one tells you.</a:t>
+            </a:r>
+          </a:p>
+          <a:p>
+            <a:pPr lvl="0" indent="0" marL="1270000">
+              <a:buNone/>
+            </a:pPr>
+            <a:r>
+              <a:rPr sz="2000" b="1"/>
+              <a:t>Important</a:t>
+            </a:r>
+          </a:p>
+          <a:p>
+            <a:pPr lvl="0" indent="0" marL="1270000">
+              <a:buNone/>
+            </a:pPr>
+            <a:r>
+              <a:rPr sz="2000" b="1"/>
+              <a:t>E2 and E3 must be handwritten</a:t>
+            </a:r>
+            <a:r>
+              <a:rPr sz="2000"/>
+              <a:t> on paper, photographed, and embedded (</a:t>
+            </a:r>
+            <a:r>
+              <a:rPr sz="2000">
+                <a:latin typeface="Courier"/>
+              </a:rPr>
+              <a:t>![caption](my_photo.jpg)</a:t>
+            </a:r>
+            <a:r>
+              <a:rPr sz="2000"/>
+              <a:t>). Typed answers to E2/E3 get </a:t>
+            </a:r>
+            <a:r>
+              <a:rPr sz="2000" b="1"/>
+              <a:t>at most half credit, even if correct</a:t>
+            </a:r>
+            <a:r>
+              <a:rPr sz="2000"/>
+              <a:t> — I want your own prediction and reasoning about </a:t>
+            </a:r>
+            <a:r>
+              <a:rPr sz="2000" i="1"/>
+              <a:t>your own</a:t>
+            </a:r>
+            <a:r>
+              <a:rPr sz="2000"/>
+              <a:t> numbers.</a:t>
+            </a:r>
+          </a:p>
+          <a:p>
+            <a:pPr lvl="0" indent="0" marL="0">
+              <a:spcBef>
+                <a:spcPts val="3000"/>
+              </a:spcBef>
+              <a:buNone/>
+            </a:pPr>
+            <a:r>
+              <a:rPr b="1"/>
+              <a:t>E1 · Three more spread statistics (4 pts)</a:t>
+            </a:r>
+          </a:p>
+          <a:p>
+            <a:pPr lvl="0" indent="0" marL="0">
+              <a:buNone/>
+            </a:pPr>
+            <a:r>
+              <a:rPr/>
+              <a:t>Extend your grouped-by-</a:t>
+            </a:r>
+            <a:r>
+              <a:rPr>
+                <a:latin typeface="Courier"/>
+              </a:rPr>
+              <a:t>side</a:t>
+            </a:r>
+            <a:r>
+              <a:rPr/>
+              <a:t> summary of </a:t>
+            </a:r>
+            <a:r>
+              <a:rPr>
+                <a:latin typeface="Courier"/>
+              </a:rPr>
+              <a:t>weight_g</a:t>
+            </a:r>
+            <a:r>
+              <a:rPr/>
+              <a:t> to also include:</a:t>
+            </a:r>
+          </a:p>
+          <a:p>
+            <a:pPr lvl="0"/>
+            <a:r>
+              <a:rPr>
+                <a:latin typeface="Courier"/>
+              </a:rPr>
+              <a:t>iqr_wt</a:t>
+            </a:r>
+            <a:r>
+              <a:rPr/>
+              <a:t> — the interquartile range (</a:t>
+            </a:r>
+            <a:r>
+              <a:rPr>
+                <a:latin typeface="Courier"/>
+              </a:rPr>
+              <a:t>IQR()</a:t>
+            </a:r>
+            <a:r>
+              <a:rPr/>
+              <a:t>, mind </a:t>
+            </a:r>
+            <a:r>
+              <a:rPr>
+                <a:latin typeface="Courier"/>
+              </a:rPr>
+              <a:t>na.rm</a:t>
+            </a:r>
+            <a:r>
+              <a:rPr/>
+              <a:t>)</a:t>
+            </a:r>
+          </a:p>
+          <a:p>
+            <a:pPr lvl="0"/>
+            <a:r>
+              <a:rPr>
+                <a:latin typeface="Courier"/>
+              </a:rPr>
+              <a:t>range_wt</a:t>
+            </a:r>
+            <a:r>
+              <a:rPr/>
+              <a:t> — </a:t>
+            </a:r>
+            <a:r>
+              <a:rPr>
+                <a:latin typeface="Courier"/>
+              </a:rPr>
+              <a:t>max(weight_g) - min(weight_g)</a:t>
+            </a:r>
+          </a:p>
+          <a:p>
+            <a:pPr lvl="0"/>
+            <a:r>
+              <a:rPr>
+                <a:latin typeface="Courier"/>
+              </a:rPr>
+              <a:t>cv_wt</a:t>
+            </a:r>
+            <a:r>
+              <a:rPr/>
+              <a:t> — the </a:t>
+            </a:r>
+            <a:r>
+              <a:rPr b="1"/>
+              <a:t>coefficient of variation</a:t>
+            </a:r>
+            <a:r>
+              <a:rPr/>
+              <a:t>, computed by hand as </a:t>
+            </a:r>
+            <a:r>
+              <a:rPr>
+                <a:latin typeface="Courier"/>
+              </a:rPr>
+              <a:t>sd(weight_g) / mean(weight_g)</a:t>
+            </a:r>
+            <a:r>
+              <a:rPr/>
+              <a:t> (a unitless measure of </a:t>
+            </a:r>
+            <a:r>
+              <a:rPr i="1"/>
+              <a:t>relative</a:t>
+            </a:r>
+            <a:r>
+              <a:rPr/>
+              <a:t> spread — you have not been shown this one; work it out from the definition)</a:t>
+            </a:r>
+          </a:p>
+          <a:p>
+            <a:pPr lvl="0" indent="0" marL="0">
+              <a:buNone/>
+            </a:pPr>
+            <a:r>
+              <a:rPr/>
+              <a:t>Show the full table (n, mean, sd, iqr_wt, range_wt, cv_wt) by side.</a:t>
+            </a:r>
+          </a:p>
+          <a:p>
+            <a:pPr lvl="0" indent="0" marL="0">
+              <a:spcBef>
+                <a:spcPts val="3000"/>
+              </a:spcBef>
+              <a:buNone/>
+            </a:pPr>
+            <a:r>
+              <a:rPr b="1"/>
+              <a:t>E2 · Predict, then check — ✍️ by hand (3 pts)</a:t>
+            </a:r>
+          </a:p>
+          <a:p>
+            <a:pPr lvl="0" indent="0" marL="0">
+              <a:buNone/>
+            </a:pPr>
+            <a:r>
+              <a:rPr b="1"/>
+              <a:t>Before running E1:</a:t>
+            </a:r>
+          </a:p>
+          <a:p>
             <a:pPr lvl="0" indent="-342900" marL="342900">
               <a:buAutoNum type="arabicPeriod"/>
             </a:pPr>
             <a:r>
-              <a:rPr b="1"/>
-              <a:t>Read the error message out loud.</a:t>
-            </a:r>
-            <a:r>
-              <a:rPr/>
-              <a:t> R usually names the line and the problem.</a:t>
+              <a:rPr/>
+              <a:t>Which side do you predict has the larger </a:t>
+            </a:r>
+            <a:r>
+              <a:rPr>
+                <a:latin typeface="Courier"/>
+              </a:rPr>
+              <a:t>sd</a:t>
+            </a:r>
+            <a:r>
+              <a:rPr/>
+              <a:t>? The larger </a:t>
+            </a:r>
+            <a:r>
+              <a:rPr>
+                <a:latin typeface="Courier"/>
+              </a:rPr>
+              <a:t>cv_wt</a:t>
+            </a:r>
+            <a:r>
+              <a:rPr/>
+              <a:t>? (They need not be the same side — think about why.)</a:t>
             </a:r>
           </a:p>
           <a:p>
@@ -3439,42 +3675,37 @@
               <a:buAutoNum type="arabicPeriod"/>
             </a:pPr>
             <a:r>
+              <a:rPr/>
+              <a:t>One reason, based on the raw Part-1 numbers you already saw.</a:t>
+            </a:r>
+          </a:p>
+          <a:p>
+            <a:pPr lvl="0" indent="0" marL="0">
+              <a:buNone/>
+            </a:pPr>
+            <a:r>
+              <a:rPr/>
+              <a:t>Then run E1 and, by hand, say whether both predictions held. If the bigger-SD side did </a:t>
+            </a:r>
+            <a:r>
+              <a:rPr i="1"/>
+              <a:t>not</a:t>
+            </a:r>
+            <a:r>
+              <a:rPr/>
+              <a:t> have the bigger CV, explain why that can happen.</a:t>
+            </a:r>
+          </a:p>
+          <a:p>
+            <a:pPr lvl="0" indent="0" marL="0">
+              <a:spcBef>
+                <a:spcPts val="3000"/>
+              </a:spcBef>
+              <a:buNone/>
+            </a:pPr>
+            <a:r>
               <a:rPr b="1"/>
-              <a:t>Check the usual suspects:</a:t>
-            </a:r>
-            <a:r>
-              <a:rPr/>
-              <a:t> Did you load </a:t>
-            </a:r>
-            <a:r>
-              <a:rPr>
-                <a:latin typeface="Courier"/>
-              </a:rPr>
-              <a:t>library(readxl)</a:t>
-            </a:r>
-            <a:r>
-              <a:rPr/>
-              <a:t>, </a:t>
-            </a:r>
-            <a:r>
-              <a:rPr>
-                <a:latin typeface="Courier"/>
-              </a:rPr>
-              <a:t>library(tidyverse)</a:t>
-            </a:r>
-            <a:r>
-              <a:rPr/>
-              <a:t>, and </a:t>
-            </a:r>
-            <a:r>
-              <a:rPr>
-                <a:latin typeface="Courier"/>
-              </a:rPr>
-              <a:t>library(skimr)</a:t>
-            </a:r>
-            <a:r>
-              <a:rPr/>
-              <a:t>?</a:t>
+              <a:t>E3 · Explain it — ✍️ by hand, with YOUR values (3 pts)</a:t>
             </a:r>
           </a:p>
           <a:p>
@@ -3482,50 +3713,36 @@
               <a:buAutoNum type="arabicPeriod"/>
             </a:pPr>
             <a:r>
-              <a:rPr b="1"/>
-              <a:t>Spelling?</a:t>
-            </a:r>
-            <a:r>
-              <a:rPr/>
-              <a:t> R is </a:t>
-            </a:r>
-            <a:r>
-              <a:rPr b="1"/>
-              <a:t>case-sensitive</a:t>
-            </a:r>
-            <a:r>
-              <a:rPr/>
-              <a:t> — </a:t>
-            </a:r>
-            <a:r>
-              <a:rPr>
-                <a:latin typeface="Courier"/>
-              </a:rPr>
-              <a:t>"Sunny"</a:t>
-            </a:r>
-            <a:r>
-              <a:rPr/>
-              <a:t> ≠ </a:t>
-            </a:r>
-            <a:r>
-              <a:rPr>
-                <a:latin typeface="Courier"/>
-              </a:rPr>
-              <a:t>"sunny"</a:t>
-            </a:r>
-            <a:r>
-              <a:rPr/>
-              <a:t>. Check with </a:t>
-            </a:r>
-            <a:r>
-              <a:rPr>
-                <a:latin typeface="Courier"/>
-              </a:rPr>
-              <a:t>names(tree_df)</a:t>
-            </a:r>
-            <a:r>
-              <a:rPr/>
-              <a:t>.</a:t>
+              <a:rPr/>
+              <a:t>In plain language, what does your </a:t>
+            </a:r>
+            <a:r>
+              <a:rPr>
+                <a:latin typeface="Courier"/>
+              </a:rPr>
+              <a:t>cv_wt</a:t>
+            </a:r>
+            <a:r>
+              <a:rPr/>
+              <a:t> tell you about the </a:t>
+            </a:r>
+            <a:r>
+              <a:rPr i="1"/>
+              <a:t>relative</a:t>
+            </a:r>
+            <a:r>
+              <a:rPr/>
+              <a:t> variability of each side that the raw </a:t>
+            </a:r>
+            <a:r>
+              <a:rPr>
+                <a:latin typeface="Courier"/>
+              </a:rPr>
+              <a:t>sd</a:t>
+            </a:r>
+            <a:r>
+              <a:rPr/>
+              <a:t> alone does not?</a:t>
             </a:r>
           </a:p>
           <a:p>
@@ -3533,87 +3750,8 @@
               <a:buAutoNum type="arabicPeriod"/>
             </a:pPr>
             <a:r>
-              <a:rPr b="1">
-                <a:latin typeface="Courier"/>
-              </a:rPr>
-              <a:t>na.rm = TRUE</a:t>
-            </a:r>
-            <a:r>
-              <a:rPr b="1"/>
-              <a:t> missing?</a:t>
-            </a:r>
-            <a:r>
-              <a:rPr/>
-              <a:t> Any stat function on a column with NAs returns </a:t>
-            </a:r>
-            <a:r>
-              <a:rPr>
-                <a:latin typeface="Courier"/>
-              </a:rPr>
-              <a:t>NA</a:t>
-            </a:r>
-            <a:r>
-              <a:rPr/>
-              <a:t> without it — no error, just a silent wrong answer.</a:t>
-            </a:r>
-          </a:p>
-          <a:p>
-            <a:pPr lvl="0" indent="-342900" marL="342900">
-              <a:buAutoNum type="arabicPeriod"/>
-            </a:pPr>
-            <a:r>
-              <a:rPr b="1"/>
-              <a:t>Cheat sheets</a:t>
-            </a:r>
-            <a:r>
-              <a:rPr/>
-              <a:t> — </a:t>
-            </a:r>
-            <a:r>
-              <a:rPr>
-                <a:hlinkClick r:id="rId2"/>
-              </a:rPr>
-              <a:t>https://posit.co/resources/cheatsheets/</a:t>
-            </a:r>
-          </a:p>
-          <a:p>
-            <a:pPr lvl="0" indent="-342900" marL="342900">
-              <a:buAutoNum type="arabicPeriod"/>
-            </a:pPr>
-            <a:r>
-              <a:rPr b="1"/>
-              <a:t>Bring the exact error</a:t>
-            </a:r>
-            <a:r>
-              <a:rPr/>
-              <a:t> (copy-paste it) to class, Canvas, or office hours.</a:t>
-            </a:r>
-          </a:p>
-          <a:p>
-            <a:pPr lvl="0" indent="0" marL="1270000">
-              <a:buNone/>
-            </a:pPr>
-            <a:r>
-              <a:rPr sz="2000"/>
-              <a:t>💡 </a:t>
-            </a:r>
-            <a:r>
-              <a:rPr sz="2000" b="1"/>
-              <a:t>Key idea:</a:t>
-            </a:r>
-            <a:r>
-              <a:rPr sz="2000"/>
-              <a:t> a missing </a:t>
-            </a:r>
-            <a:r>
-              <a:rPr sz="2000">
-                <a:latin typeface="Courier"/>
-              </a:rPr>
-              <a:t>na.rm = TRUE</a:t>
-            </a:r>
-            <a:r>
-              <a:rPr sz="2000"/>
-              <a:t>, a typo’d column name — these are the errors this worksheet is built around, and reading the message before you panic will solve most of them.</a:t>
+              <a:rPr/>
+              <a:t>Why is the CV useful for comparing spread between two groups with different means, when the raw SD can mislead?</a:t>
             </a:r>
           </a:p>
         </p:txBody>
@@ -3624,6 +3762,269 @@
 </file>
 
 <file path=ppt/slides/slide11.xml><?xml version="1.0" encoding="utf-8"?>
+<p:sld xmlns:a="http://schemas.openxmlformats.org/drawingml/2006/main" xmlns:r="http://schemas.openxmlformats.org/officeDocument/2006/relationships" xmlns:p="http://schemas.openxmlformats.org/presentationml/2006/main">
+  <p:cSld>
+    <p:spTree>
+      <p:nvGrpSpPr>
+        <p:cNvPr id="1" name=""/>
+        <p:cNvGrpSpPr/>
+        <p:nvPr/>
+      </p:nvGrpSpPr>
+      <p:grpSpPr>
+        <a:xfrm>
+          <a:off x="0" y="0"/>
+          <a:ext cx="0" cy="0"/>
+          <a:chOff x="0" y="0"/>
+          <a:chExt cx="0" cy="0"/>
+        </a:xfrm>
+      </p:grpSpPr>
+      <p:sp>
+        <p:nvSpPr>
+          <p:cNvPr id="2" name="Title 1"/>
+          <p:cNvSpPr>
+            <a:spLocks noGrp="1"/>
+          </p:cNvSpPr>
+          <p:nvPr>
+            <p:ph type="title"/>
+          </p:nvPr>
+        </p:nvSpPr>
+        <p:spPr>
+          <a:xfrm>
+            <a:off x="0" y="0"/>
+            <a:ext cx="9144000" cy="582780"/>
+          </a:xfrm>
+        </p:spPr>
+        <p:txBody>
+          <a:bodyPr/>
+          <a:lstStyle/>
+          <a:p>
+            <a:pPr lvl="0" indent="0" marL="0">
+              <a:buNone/>
+            </a:pPr>
+            <a:r>
+              <a:rPr/>
+              <a:t>Getting unstuck</a:t>
+            </a:r>
+          </a:p>
+        </p:txBody>
+      </p:sp>
+      <p:sp>
+        <p:nvSpPr>
+          <p:cNvPr id="3" name="Content Placeholder 2"/>
+          <p:cNvSpPr>
+            <a:spLocks noGrp="1"/>
+          </p:cNvSpPr>
+          <p:nvPr>
+            <p:ph idx="1"/>
+          </p:nvPr>
+        </p:nvSpPr>
+        <p:spPr/>
+        <p:txBody>
+          <a:bodyPr/>
+          <a:lstStyle/>
+          <a:p>
+            <a:pPr lvl="0" indent="-342900" marL="342900">
+              <a:buAutoNum type="arabicPeriod"/>
+            </a:pPr>
+            <a:r>
+              <a:rPr b="1"/>
+              <a:t>Read the error message out loud.</a:t>
+            </a:r>
+            <a:r>
+              <a:rPr/>
+              <a:t> R usually names the line and the problem.</a:t>
+            </a:r>
+          </a:p>
+          <a:p>
+            <a:pPr lvl="0" indent="-342900" marL="342900">
+              <a:buAutoNum type="arabicPeriod"/>
+            </a:pPr>
+            <a:r>
+              <a:rPr b="1"/>
+              <a:t>Check the usual suspects:</a:t>
+            </a:r>
+            <a:r>
+              <a:rPr/>
+              <a:t> Did you load </a:t>
+            </a:r>
+            <a:r>
+              <a:rPr>
+                <a:latin typeface="Courier"/>
+              </a:rPr>
+              <a:t>library(readxl)</a:t>
+            </a:r>
+            <a:r>
+              <a:rPr/>
+              <a:t>, </a:t>
+            </a:r>
+            <a:r>
+              <a:rPr>
+                <a:latin typeface="Courier"/>
+              </a:rPr>
+              <a:t>library(tidyverse)</a:t>
+            </a:r>
+            <a:r>
+              <a:rPr/>
+              <a:t>, and </a:t>
+            </a:r>
+            <a:r>
+              <a:rPr>
+                <a:latin typeface="Courier"/>
+              </a:rPr>
+              <a:t>library(skimr)</a:t>
+            </a:r>
+            <a:r>
+              <a:rPr/>
+              <a:t>?</a:t>
+            </a:r>
+          </a:p>
+          <a:p>
+            <a:pPr lvl="0" indent="-342900" marL="342900">
+              <a:buAutoNum type="arabicPeriod"/>
+            </a:pPr>
+            <a:r>
+              <a:rPr b="1"/>
+              <a:t>Spelling?</a:t>
+            </a:r>
+            <a:r>
+              <a:rPr/>
+              <a:t> R is </a:t>
+            </a:r>
+            <a:r>
+              <a:rPr b="1"/>
+              <a:t>case-sensitive</a:t>
+            </a:r>
+            <a:r>
+              <a:rPr/>
+              <a:t> — </a:t>
+            </a:r>
+            <a:r>
+              <a:rPr>
+                <a:latin typeface="Courier"/>
+              </a:rPr>
+              <a:t>"Sunny"</a:t>
+            </a:r>
+            <a:r>
+              <a:rPr/>
+              <a:t> ≠ </a:t>
+            </a:r>
+            <a:r>
+              <a:rPr>
+                <a:latin typeface="Courier"/>
+              </a:rPr>
+              <a:t>"sunny"</a:t>
+            </a:r>
+            <a:r>
+              <a:rPr/>
+              <a:t>. Check with </a:t>
+            </a:r>
+            <a:r>
+              <a:rPr>
+                <a:latin typeface="Courier"/>
+              </a:rPr>
+              <a:t>names(tree_df)</a:t>
+            </a:r>
+            <a:r>
+              <a:rPr/>
+              <a:t>.</a:t>
+            </a:r>
+          </a:p>
+          <a:p>
+            <a:pPr lvl="0" indent="-342900" marL="342900">
+              <a:buAutoNum type="arabicPeriod"/>
+            </a:pPr>
+            <a:r>
+              <a:rPr b="1">
+                <a:latin typeface="Courier"/>
+              </a:rPr>
+              <a:t>na.rm = TRUE</a:t>
+            </a:r>
+            <a:r>
+              <a:rPr b="1"/>
+              <a:t> missing?</a:t>
+            </a:r>
+            <a:r>
+              <a:rPr/>
+              <a:t> Any stat function on a column with NAs returns </a:t>
+            </a:r>
+            <a:r>
+              <a:rPr>
+                <a:latin typeface="Courier"/>
+              </a:rPr>
+              <a:t>NA</a:t>
+            </a:r>
+            <a:r>
+              <a:rPr/>
+              <a:t> without it — no error, just a silent wrong answer.</a:t>
+            </a:r>
+          </a:p>
+          <a:p>
+            <a:pPr lvl="0" indent="-342900" marL="342900">
+              <a:buAutoNum type="arabicPeriod"/>
+            </a:pPr>
+            <a:r>
+              <a:rPr b="1"/>
+              <a:t>Cheat sheets</a:t>
+            </a:r>
+            <a:r>
+              <a:rPr/>
+              <a:t> — </a:t>
+            </a:r>
+            <a:r>
+              <a:rPr>
+                <a:hlinkClick r:id="rId2"/>
+              </a:rPr>
+              <a:t>https://posit.co/resources/cheatsheets/</a:t>
+            </a:r>
+          </a:p>
+          <a:p>
+            <a:pPr lvl="0" indent="-342900" marL="342900">
+              <a:buAutoNum type="arabicPeriod"/>
+            </a:pPr>
+            <a:r>
+              <a:rPr b="1"/>
+              <a:t>Bring the exact error</a:t>
+            </a:r>
+            <a:r>
+              <a:rPr/>
+              <a:t> (copy-paste it) to class, Canvas, or office hours.</a:t>
+            </a:r>
+          </a:p>
+          <a:p>
+            <a:pPr lvl="0" indent="0" marL="1270000">
+              <a:buNone/>
+            </a:pPr>
+            <a:r>
+              <a:rPr sz="2000"/>
+              <a:t>💡 </a:t>
+            </a:r>
+            <a:r>
+              <a:rPr sz="2000" b="1"/>
+              <a:t>Key idea:</a:t>
+            </a:r>
+            <a:r>
+              <a:rPr sz="2000"/>
+              <a:t> a missing </a:t>
+            </a:r>
+            <a:r>
+              <a:rPr sz="2000">
+                <a:latin typeface="Courier"/>
+              </a:rPr>
+              <a:t>na.rm = TRUE</a:t>
+            </a:r>
+            <a:r>
+              <a:rPr sz="2000"/>
+              <a:t>, a typo’d column name — these are the errors this worksheet is built around, and reading the message before you panic will solve most of them.</a:t>
+            </a:r>
+          </a:p>
+        </p:txBody>
+      </p:sp>
+    </p:spTree>
+  </p:cSld>
+</p:sld>
+</file>
+
+<file path=ppt/slides/slide12.xml><?xml version="1.0" encoding="utf-8"?>
 <p:sld xmlns:a="http://schemas.openxmlformats.org/drawingml/2006/main" xmlns:r="http://schemas.openxmlformats.org/officeDocument/2006/relationships" xmlns:p="http://schemas.openxmlformats.org/presentationml/2006/main">
   <p:cSld>
     <p:spTree>
@@ -3660,7 +4061,7 @@
             </a:pPr>
             <a:r>
               <a:rPr i="1"/>
-              <a:t>End of Worksheet 06. Next: Worksheet 07 covers Quarto — writing reproducible reports that mix prose, code, and results in one document.</a:t>
+              <a:t>End of the Summary Statistics worksheet. Next: Quarto — writing reproducible reports that mix prose, code, and results in one document.</a:t>
             </a:r>
           </a:p>
         </p:txBody>
